--- a/blok-dijagram.pptx
+++ b/blok-dijagram.pptx
@@ -4072,9 +4072,10 @@
           <a:lstStyle/>
           <a:p>
             <a:r>
-              <a:rPr lang="sr-Latn-RS" sz="900" dirty="0" smtClean="0"/>
-              <a:t>SHA</a:t>
-            </a:r>
+              <a:rPr lang="en-US" sz="900" dirty="0" smtClean="0"/>
+              <a:t>DES</a:t>
+            </a:r>
+            <a:endParaRPr lang="sr-Latn-RS" sz="900" dirty="0" smtClean="0"/>
           </a:p>
         </p:txBody>
       </p:sp>
@@ -6024,8 +6025,8 @@
           <a:lstStyle/>
           <a:p>
             <a:r>
-              <a:rPr lang="sr-Latn-RS" sz="900" dirty="0" smtClean="0"/>
-              <a:t>SHA</a:t>
+              <a:rPr lang="en-US" sz="900" dirty="0" smtClean="0"/>
+              <a:t>DES</a:t>
             </a:r>
           </a:p>
         </p:txBody>
